--- a/public/fun/pack/pptx/talkpro/발표템플릿프리미엄_34_모임·동호회소개_포레스트골드.pptx
+++ b/public/fun/pack/pptx/talkpro/발표템플릿프리미엄_34_모임·동호회소개_포레스트골드.pptx
@@ -115,12 +115,12 @@
   <p:extLst>
     <p:ext uri="{521415D9-36F7-43E2-AB2F-B90AF26B5E84}">
       <p14:sectionLst xmlns:p14="http://schemas.microsoft.com/office/powerpoint/2010/main">
-        <p14:section name="시작" id="{20ED7CD9-5CD4-44DD-9403-FBCA9FEEA1E7}">
+        <p14:section name="시작" id="{5968CD7D-A0BD-4746-A02E-0CA68E5F3C3F}">
           <p14:sldIdLst>
             <p14:sldId id="256"/>
           </p14:sldIdLst>
         </p14:section>
-        <p14:section name="본문" id="{03055144-01EB-4555-9063-23E12A539CFD}">
+        <p14:section name="본문" id="{72A8272C-D4C5-4EDF-AC76-847E176D8322}">
           <p14:sldIdLst>
             <p14:sldId id="257"/>
             <p14:sldId id="258"/>
@@ -131,7 +131,7 @@
             <p14:sldId id="263"/>
           </p14:sldIdLst>
         </p14:section>
-        <p14:section name="마무리" id="{F5D24BB8-7210-478E-A8DC-4AF251F68463}">
+        <p14:section name="마무리" id="{085A4E67-4164-4F5C-9673-063FE32768BE}">
           <p14:sldIdLst>
             <p14:sldId id="264"/>
           </p14:sldIdLst>
@@ -1977,7 +1977,7 @@
             </a:lvl1pPr>
           </a:lstStyle>
           <a:p>
-            <a:fld id="{DD224EFB-D0C1-4E9F-BFBA-D4DF6B51984F}" type="slidenum">
+            <a:fld id="{D745191B-F1B4-41BE-9446-01C277A3CAFE}" type="slidenum">
               <a:rPr lang="en-US"/>
               <a:t>‹#›</a:t>
             </a:fld>
@@ -2803,7 +2803,7 @@
             </a:lvl1pPr>
           </a:lstStyle>
           <a:p>
-            <a:fld id="{30F41205-42D5-4A22-802F-090B715DEC4C}" type="slidenum">
+            <a:fld id="{14B40328-BEC9-4DAC-95E4-A76C8ED64CD9}" type="slidenum">
               <a:rPr lang="en-US"/>
               <a:t>‹#›</a:t>
             </a:fld>
@@ -3556,7 +3556,7 @@
             </a:lvl1pPr>
           </a:lstStyle>
           <a:p>
-            <a:fld id="{D81D6418-F0EC-4FF9-9BCC-A2D4D91053FF}" type="slidenum">
+            <a:fld id="{61D014CB-F8F3-49AD-AAC8-FD00E36663CE}" type="slidenum">
               <a:rPr lang="en-US"/>
               <a:t>‹#›</a:t>
             </a:fld>
@@ -4539,7 +4539,7 @@
           <a:p>
             <a:r>
               <a:rPr lang="ko-KR"/>
-              <a:t>0000. 00. 00</a:t>
+              <a:t>날짜 입력</a:t>
             </a:r>
           </a:p>
         </p:txBody>
@@ -4624,7 +4624,7 @@
           <a:bodyPr/>
           <a:lstStyle/>
           <a:p>
-            <a:fld id="{034858DC-4F19-4839-9D35-763B13B03C31}" type="slidenum">
+            <a:fld id="{93DB23FE-85DD-4860-97F6-BDAB07A187FD}" type="slidenum">
               <a:rPr lang="en-US"/>
               <a:t>‹#›</a:t>
             </a:fld>
@@ -5726,7 +5726,7 @@
           <a:bodyPr/>
           <a:lstStyle/>
           <a:p>
-            <a:fld id="{1AFA9351-B9F9-489F-A58F-34914C8C1767}" type="slidenum">
+            <a:fld id="{A8237EB5-D6E6-40BE-9FEB-027D527FB8B3}" type="slidenum">
               <a:rPr lang="en-US"/>
               <a:t>‹#›</a:t>
             </a:fld>
@@ -5814,7 +5814,7 @@
           <a:bodyPr/>
           <a:lstStyle/>
           <a:p>
-            <a:fld id="{8DAA6B0D-D9C4-4957-9C1F-8C2504DE6391}" type="slidenum">
+            <a:fld id="{600EC3C2-675A-4DCD-86C8-B11166E08D26}" type="slidenum">
               <a:rPr lang="en-US"/>
               <a:t>‹#›</a:t>
             </a:fld>
@@ -6712,7 +6712,7 @@
           <a:bodyPr/>
           <a:lstStyle/>
           <a:p>
-            <a:fld id="{16232F19-E016-4F98-90FC-09D6D0161762}" type="slidenum">
+            <a:fld id="{DE18F300-74CB-4DE8-BB0B-D0C494A924EF}" type="slidenum">
               <a:rPr lang="en-US"/>
               <a:t>‹#›</a:t>
             </a:fld>
@@ -7310,7 +7310,7 @@
           <a:bodyPr/>
           <a:lstStyle/>
           <a:p>
-            <a:fld id="{D36039CF-EA52-463B-BF7D-90BA21144876}" type="slidenum">
+            <a:fld id="{8112152F-A90C-4340-8BC5-36680F409F51}" type="slidenum">
               <a:rPr lang="en-US"/>
               <a:t>‹#›</a:t>
             </a:fld>
@@ -7490,7 +7490,7 @@
           <a:bodyPr/>
           <a:lstStyle/>
           <a:p>
-            <a:fld id="{20E15F73-A20D-40DF-A240-F067499E547B}" type="slidenum">
+            <a:fld id="{D67294A7-21C7-4FEB-9B0E-5127C7D3FB42}" type="slidenum">
               <a:rPr lang="en-US"/>
               <a:t>‹#›</a:t>
             </a:fld>
@@ -8554,7 +8554,7 @@
           <a:bodyPr/>
           <a:lstStyle/>
           <a:p>
-            <a:fld id="{ACCB2BAF-85B6-4506-A3B1-6AC9D5409BB4}" type="slidenum">
+            <a:fld id="{50F3EB23-742F-4B2F-9ADB-FB4E4704F20A}" type="slidenum">
               <a:rPr lang="en-US"/>
               <a:t>‹#›</a:t>
             </a:fld>
